--- a/ClassNote/BrilliantAlgorithmClass_1주차.pptx
+++ b/ClassNote/BrilliantAlgorithmClass_1주차.pptx
@@ -10035,12 +10035,12 @@
               <a:t>, </a:t>
             </a:r>
             <a:r>
-              <a:rPr lang="en-US" altLang="ko-KR" b="1" dirty="0" err="1">
+              <a:rPr lang="en-US" altLang="ko-KR" b="1">
                 <a:solidFill>
                   <a:schemeClr val="bg1"/>
                 </a:solidFill>
               </a:rPr>
-              <a:t>Djistra</a:t>
+              <a:t>Djikstra</a:t>
             </a:r>
             <a:r>
               <a:rPr lang="en-US" altLang="ko-KR" b="1" dirty="0">
